--- a/curso/pptx/S24.pptx
+++ b/curso/pptx/S24.pptx
@@ -3818,8 +3818,8 @@
         </p:nvSpPr>
         <p:spPr>
           <a:xfrm>
-            <a:off x="640000" y="420000"/>
-            <a:ext cx="10912000" cy="420000"/>
+            <a:off x="10652000" y="380000"/>
+            <a:ext cx="900000" cy="800000"/>
           </a:xfrm>
           <a:prstGeom prst="rect">
             <a:avLst/>
@@ -3834,17 +3834,17 @@
           <a:p>
             <a:pPr>
               <a:spcAft>
-                <a:spcPts val="810"/>
+                <a:spcPts val="1980"/>
               </a:spcAft>
             </a:pPr>
             <a:r>
-              <a:rPr sz="1800" b="1">
+              <a:rPr sz="4400" b="0">
                 <a:solidFill>
                   <a:srgbClr val="1F2A44"/>
                 </a:solidFill>
                 <a:latin typeface="Nunito Sans"/>
               </a:rPr>
-              <a:t>🦉 Aula de Filosofía</a:t>
+              <a:t>🙃</a:t>
             </a:r>
           </a:p>
         </p:txBody>

--- a/curso/pptx/S24.pptx
+++ b/curso/pptx/S24.pptx
@@ -469,356 +469,6 @@
     </a:lvl9pPr>
   </p:notesStyle>
 </p:notesMaster>
-</file>
-
-<file path=ppt/notesSlides/notesSlide1.xml><?xml version="1.0" encoding="utf-8"?>
-<p:notes xmlns:a="http://schemas.openxmlformats.org/drawingml/2006/main" xmlns:p="http://schemas.openxmlformats.org/presentationml/2006/main" xmlns:r="http://schemas.openxmlformats.org/officeDocument/2006/relationships">
-  <p:cSld>
-    <p:spTree>
-      <p:nvGrpSpPr>
-        <p:cNvPr id="1" name=""/>
-        <p:cNvGrpSpPr/>
-        <p:nvPr/>
-      </p:nvGrpSpPr>
-      <p:grpSpPr>
-        <a:xfrm>
-          <a:off x="0" y="0"/>
-          <a:ext cx="0" cy="0"/>
-          <a:chOff x="0" y="0"/>
-          <a:chExt cx="0" cy="0"/>
-        </a:xfrm>
-      </p:grpSpPr>
-      <p:sp>
-        <p:nvSpPr>
-          <p:cNvPr id="2" name="Slide Image Placeholder 1"/>
-          <p:cNvSpPr>
-            <a:spLocks noGrp="1"/>
-          </p:cNvSpPr>
-          <p:nvPr>
-            <p:ph type="sldImg" idx="2"/>
-          </p:nvPr>
-        </p:nvSpPr>
-        <p:spPr/>
-      </p:sp>
-      <p:sp>
-        <p:nvSpPr>
-          <p:cNvPr id="3" name="Notes Placeholder 2"/>
-          <p:cNvSpPr>
-            <a:spLocks noGrp="1"/>
-          </p:cNvSpPr>
-          <p:nvPr>
-            <p:ph type="body" idx="3" sz="quarter"/>
-          </p:nvPr>
-        </p:nvSpPr>
-        <p:spPr/>
-        <p:txBody>
-          <a:bodyPr/>
-          <a:lstStyle/>
-          <a:p>
-            <a:r>
-              <a:t>3 minutos. Sin apuntes. Es para recordar, no cuenta para nota.</a:t>
-            </a:r>
-          </a:p>
-        </p:txBody>
-      </p:sp>
-      <p:sp>
-        <p:nvSpPr>
-          <p:cNvPr id="4" name="Slide Number Placeholder 3"/>
-          <p:cNvSpPr>
-            <a:spLocks noGrp="1"/>
-          </p:cNvSpPr>
-          <p:nvPr>
-            <p:ph type="sldNum" idx="5" sz="quarter"/>
-          </p:nvPr>
-        </p:nvSpPr>
-        <p:spPr/>
-      </p:sp>
-    </p:spTree>
-  </p:cSld>
-  <p:clrMapOvr>
-    <a:masterClrMapping/>
-  </p:clrMapOvr>
-</p:notes>
-</file>
-
-<file path=ppt/notesSlides/notesSlide2.xml><?xml version="1.0" encoding="utf-8"?>
-<p:notes xmlns:a="http://schemas.openxmlformats.org/drawingml/2006/main" xmlns:p="http://schemas.openxmlformats.org/presentationml/2006/main" xmlns:r="http://schemas.openxmlformats.org/officeDocument/2006/relationships">
-  <p:cSld>
-    <p:spTree>
-      <p:nvGrpSpPr>
-        <p:cNvPr id="1" name=""/>
-        <p:cNvGrpSpPr/>
-        <p:nvPr/>
-      </p:nvGrpSpPr>
-      <p:grpSpPr>
-        <a:xfrm>
-          <a:off x="0" y="0"/>
-          <a:ext cx="0" cy="0"/>
-          <a:chOff x="0" y="0"/>
-          <a:chExt cx="0" cy="0"/>
-        </a:xfrm>
-      </p:grpSpPr>
-      <p:sp>
-        <p:nvSpPr>
-          <p:cNvPr id="2" name="Slide Image Placeholder 1"/>
-          <p:cNvSpPr>
-            <a:spLocks noGrp="1"/>
-          </p:cNvSpPr>
-          <p:nvPr>
-            <p:ph type="sldImg" idx="2"/>
-          </p:nvPr>
-        </p:nvSpPr>
-        <p:spPr/>
-      </p:sp>
-      <p:sp>
-        <p:nvSpPr>
-          <p:cNvPr id="3" name="Notes Placeholder 2"/>
-          <p:cNvSpPr>
-            <a:spLocks noGrp="1"/>
-          </p:cNvSpPr>
-          <p:nvPr>
-            <p:ph type="body" idx="3" sz="quarter"/>
-          </p:nvPr>
-        </p:nvSpPr>
-        <p:spPr/>
-        <p:txBody>
-          <a:bodyPr/>
-          <a:lstStyle/>
-          <a:p>
-            <a:r>
-              <a:t>3 minutos. Sin apuntes. Es para recordar, no cuenta para nota.</a:t>
-            </a:r>
-          </a:p>
-        </p:txBody>
-      </p:sp>
-      <p:sp>
-        <p:nvSpPr>
-          <p:cNvPr id="4" name="Slide Number Placeholder 3"/>
-          <p:cNvSpPr>
-            <a:spLocks noGrp="1"/>
-          </p:cNvSpPr>
-          <p:nvPr>
-            <p:ph type="sldNum" idx="5" sz="quarter"/>
-          </p:nvPr>
-        </p:nvSpPr>
-        <p:spPr/>
-      </p:sp>
-    </p:spTree>
-  </p:cSld>
-  <p:clrMapOvr>
-    <a:masterClrMapping/>
-  </p:clrMapOvr>
-</p:notes>
-</file>
-
-<file path=ppt/notesSlides/notesSlide3.xml><?xml version="1.0" encoding="utf-8"?>
-<p:notes xmlns:a="http://schemas.openxmlformats.org/drawingml/2006/main" xmlns:p="http://schemas.openxmlformats.org/presentationml/2006/main" xmlns:r="http://schemas.openxmlformats.org/officeDocument/2006/relationships">
-  <p:cSld>
-    <p:spTree>
-      <p:nvGrpSpPr>
-        <p:cNvPr id="1" name=""/>
-        <p:cNvGrpSpPr/>
-        <p:nvPr/>
-      </p:nvGrpSpPr>
-      <p:grpSpPr>
-        <a:xfrm>
-          <a:off x="0" y="0"/>
-          <a:ext cx="0" cy="0"/>
-          <a:chOff x="0" y="0"/>
-          <a:chExt cx="0" cy="0"/>
-        </a:xfrm>
-      </p:grpSpPr>
-      <p:sp>
-        <p:nvSpPr>
-          <p:cNvPr id="2" name="Slide Image Placeholder 1"/>
-          <p:cNvSpPr>
-            <a:spLocks noGrp="1"/>
-          </p:cNvSpPr>
-          <p:nvPr>
-            <p:ph type="sldImg" idx="2"/>
-          </p:nvPr>
-        </p:nvSpPr>
-        <p:spPr/>
-      </p:sp>
-      <p:sp>
-        <p:nvSpPr>
-          <p:cNvPr id="3" name="Notes Placeholder 2"/>
-          <p:cNvSpPr>
-            <a:spLocks noGrp="1"/>
-          </p:cNvSpPr>
-          <p:nvPr>
-            <p:ph type="body" idx="3" sz="quarter"/>
-          </p:nvPr>
-        </p:nvSpPr>
-        <p:spPr/>
-        <p:txBody>
-          <a:bodyPr/>
-          <a:lstStyle/>
-          <a:p>
-            <a:r>
-              <a:t>Nadie tiene que contestar: solo pensarlo.</a:t>
-            </a:r>
-          </a:p>
-        </p:txBody>
-      </p:sp>
-      <p:sp>
-        <p:nvSpPr>
-          <p:cNvPr id="4" name="Slide Number Placeholder 3"/>
-          <p:cNvSpPr>
-            <a:spLocks noGrp="1"/>
-          </p:cNvSpPr>
-          <p:nvPr>
-            <p:ph type="sldNum" idx="5" sz="quarter"/>
-          </p:nvPr>
-        </p:nvSpPr>
-        <p:spPr/>
-      </p:sp>
-    </p:spTree>
-  </p:cSld>
-  <p:clrMapOvr>
-    <a:masterClrMapping/>
-  </p:clrMapOvr>
-</p:notes>
-</file>
-
-<file path=ppt/notesSlides/notesSlide4.xml><?xml version="1.0" encoding="utf-8"?>
-<p:notes xmlns:a="http://schemas.openxmlformats.org/drawingml/2006/main" xmlns:p="http://schemas.openxmlformats.org/presentationml/2006/main" xmlns:r="http://schemas.openxmlformats.org/officeDocument/2006/relationships">
-  <p:cSld>
-    <p:spTree>
-      <p:nvGrpSpPr>
-        <p:cNvPr id="1" name=""/>
-        <p:cNvGrpSpPr/>
-        <p:nvPr/>
-      </p:nvGrpSpPr>
-      <p:grpSpPr>
-        <a:xfrm>
-          <a:off x="0" y="0"/>
-          <a:ext cx="0" cy="0"/>
-          <a:chOff x="0" y="0"/>
-          <a:chExt cx="0" cy="0"/>
-        </a:xfrm>
-      </p:grpSpPr>
-      <p:sp>
-        <p:nvSpPr>
-          <p:cNvPr id="2" name="Slide Image Placeholder 1"/>
-          <p:cNvSpPr>
-            <a:spLocks noGrp="1"/>
-          </p:cNvSpPr>
-          <p:nvPr>
-            <p:ph type="sldImg" idx="2"/>
-          </p:nvPr>
-        </p:nvSpPr>
-        <p:spPr/>
-      </p:sp>
-      <p:sp>
-        <p:nvSpPr>
-          <p:cNvPr id="3" name="Notes Placeholder 2"/>
-          <p:cNvSpPr>
-            <a:spLocks noGrp="1"/>
-          </p:cNvSpPr>
-          <p:nvPr>
-            <p:ph type="body" idx="3" sz="quarter"/>
-          </p:nvPr>
-        </p:nvSpPr>
-        <p:spPr/>
-        <p:txBody>
-          <a:bodyPr/>
-          <a:lstStyle/>
-          <a:p>
-            <a:r>
-              <a:t>Dejar unos segundos para que piensen la respuesta fácil antes de enseñar los pasos.</a:t>
-            </a:r>
-          </a:p>
-        </p:txBody>
-      </p:sp>
-      <p:sp>
-        <p:nvSpPr>
-          <p:cNvPr id="4" name="Slide Number Placeholder 3"/>
-          <p:cNvSpPr>
-            <a:spLocks noGrp="1"/>
-          </p:cNvSpPr>
-          <p:nvPr>
-            <p:ph type="sldNum" idx="5" sz="quarter"/>
-          </p:nvPr>
-        </p:nvSpPr>
-        <p:spPr/>
-      </p:sp>
-    </p:spTree>
-  </p:cSld>
-  <p:clrMapOvr>
-    <a:masterClrMapping/>
-  </p:clrMapOvr>
-</p:notes>
-</file>
-
-<file path=ppt/notesSlides/notesSlide5.xml><?xml version="1.0" encoding="utf-8"?>
-<p:notes xmlns:a="http://schemas.openxmlformats.org/drawingml/2006/main" xmlns:p="http://schemas.openxmlformats.org/presentationml/2006/main" xmlns:r="http://schemas.openxmlformats.org/officeDocument/2006/relationships">
-  <p:cSld>
-    <p:spTree>
-      <p:nvGrpSpPr>
-        <p:cNvPr id="1" name=""/>
-        <p:cNvGrpSpPr/>
-        <p:nvPr/>
-      </p:nvGrpSpPr>
-      <p:grpSpPr>
-        <a:xfrm>
-          <a:off x="0" y="0"/>
-          <a:ext cx="0" cy="0"/>
-          <a:chOff x="0" y="0"/>
-          <a:chExt cx="0" cy="0"/>
-        </a:xfrm>
-      </p:grpSpPr>
-      <p:sp>
-        <p:nvSpPr>
-          <p:cNvPr id="2" name="Slide Image Placeholder 1"/>
-          <p:cNvSpPr>
-            <a:spLocks noGrp="1"/>
-          </p:cNvSpPr>
-          <p:nvPr>
-            <p:ph type="sldImg" idx="2"/>
-          </p:nvPr>
-        </p:nvSpPr>
-        <p:spPr/>
-      </p:sp>
-      <p:sp>
-        <p:nvSpPr>
-          <p:cNvPr id="3" name="Notes Placeholder 2"/>
-          <p:cNvSpPr>
-            <a:spLocks noGrp="1"/>
-          </p:cNvSpPr>
-          <p:nvPr>
-            <p:ph type="body" idx="3" sz="quarter"/>
-          </p:nvPr>
-        </p:nvSpPr>
-        <p:spPr/>
-        <p:txBody>
-          <a:bodyPr/>
-          <a:lstStyle/>
-          <a:p>
-            <a:r>
-              <a:t>Dejar 2 minutos para que lo escriban. La diapositiva siguiente muestra el resumen.</a:t>
-            </a:r>
-          </a:p>
-        </p:txBody>
-      </p:sp>
-      <p:sp>
-        <p:nvSpPr>
-          <p:cNvPr id="4" name="Slide Number Placeholder 3"/>
-          <p:cNvSpPr>
-            <a:spLocks noGrp="1"/>
-          </p:cNvSpPr>
-          <p:nvPr>
-            <p:ph type="sldNum" idx="5" sz="quarter"/>
-          </p:nvPr>
-        </p:nvSpPr>
-        <p:spPr/>
-      </p:sp>
-    </p:spTree>
-  </p:cSld>
-  <p:clrMapOvr>
-    <a:masterClrMapping/>
-  </p:clrMapOvr>
-</p:notes>
 </file>
 
 <file path=ppt/slideLayouts/slideLayout1.xml><?xml version="1.0" encoding="utf-8"?>

--- a/curso/pptx/S24.pptx
+++ b/curso/pptx/S24.pptx
@@ -6793,7 +6793,7 @@
                           </a:solidFill>
                           <a:latin typeface="Nunito Sans"/>
                         </a:rPr>
-                        <a:t>Causa falsa (post hoc)</a:t>
+                        <a:t>Causa falsa</a:t>
                       </a:r>
                     </a:p>
                   </a:txBody>
@@ -6861,7 +6861,7 @@
                           </a:solidFill>
                           <a:latin typeface="Nunito Sans"/>
                         </a:rPr>
-                        <a:t>Apelación a la ignorancia (ad ignorantiam)</a:t>
+                        <a:t>Apelación a la ignorancia</a:t>
                       </a:r>
                     </a:p>
                   </a:txBody>
@@ -6929,7 +6929,7 @@
                           </a:solidFill>
                           <a:latin typeface="Nunito Sans"/>
                         </a:rPr>
-                        <a:t>Razonamiento circular (petitio principii)</a:t>
+                        <a:t>Razonamiento circular</a:t>
                       </a:r>
                     </a:p>
                   </a:txBody>

--- a/curso/pptx/S24.pptx
+++ b/curso/pptx/S24.pptx
@@ -20,6 +20,7 @@
     <p:sldId id="268" r:id="rId20"/>
     <p:sldId id="269" r:id="rId21"/>
     <p:sldId id="270" r:id="rId22"/>
+    <p:sldId id="271" r:id="rId23"/>
   </p:sldIdLst>
   <p:sldSz cx="12192000" cy="6858000" type="screen4x3"/>
   <p:notesSz cx="6858000" cy="9144000"/>
@@ -3533,7 +3534,7 @@
                 </a:solidFill>
                 <a:latin typeface="Nunito Sans"/>
               </a:rPr>
-              <a:t>PENSAMIENTO CRÍTICO · SESIÓN 24 · UNIDAD 4 · FALACIAS II: RAZONAR MAL</a:t>
+              <a:t>PENSAMIENTO CRÍTICO · SESIÓN 24 · UNIDAD 4 · FALACIAS I: ATACAR, DESVIAR, EMOCIONAR</a:t>
             </a:r>
           </a:p>
         </p:txBody>
@@ -3611,7 +3612,7 @@
                 </a:solidFill>
                 <a:latin typeface="Nunito Sans"/>
               </a:rPr>
-              <a:t>Repasamos las falacias que razonan mal: generalización apresurada, falso dilema, pendiente resbaladiza, causa falsa, ignorancia y razonamiento circular.</a:t>
+              <a:t>Repasamos qué es una falacia y las que atacan a la persona, deforman la idea, desvían el tema o usan emociones.</a:t>
             </a:r>
           </a:p>
         </p:txBody>
@@ -3625,6 +3626,260 @@
 </file>
 
 <file path=ppt/slides/slide10.xml><?xml version="1.0" encoding="utf-8"?>
+<p:sld xmlns:a="http://schemas.openxmlformats.org/drawingml/2006/main" xmlns:p="http://schemas.openxmlformats.org/presentationml/2006/main" xmlns:r="http://schemas.openxmlformats.org/officeDocument/2006/relationships">
+  <p:cSld>
+    <p:bg>
+      <p:bgPr>
+        <a:solidFill>
+          <a:srgbClr val="FBF7EF"/>
+        </a:solidFill>
+        <a:effectLst/>
+      </p:bgPr>
+    </p:bg>
+    <p:spTree>
+      <p:nvGrpSpPr>
+        <p:cNvPr id="1" name=""/>
+        <p:cNvGrpSpPr/>
+        <p:nvPr/>
+      </p:nvGrpSpPr>
+      <p:grpSpPr/>
+      <p:sp>
+        <p:nvSpPr>
+          <p:cNvPr id="2" name="TextBox 1"/>
+          <p:cNvSpPr txBox="1"/>
+          <p:nvPr/>
+        </p:nvSpPr>
+        <p:spPr>
+          <a:xfrm>
+            <a:off x="640000" y="380000"/>
+            <a:ext cx="10912000" cy="420000"/>
+          </a:xfrm>
+          <a:prstGeom prst="rect">
+            <a:avLst/>
+          </a:prstGeom>
+          <a:noFill/>
+        </p:spPr>
+        <p:txBody>
+          <a:bodyPr wrap="square">
+            <a:spAutoFit/>
+          </a:bodyPr>
+          <a:lstStyle/>
+          <a:p>
+            <a:pPr>
+              <a:spcAft>
+                <a:spcPts val="630"/>
+              </a:spcAft>
+            </a:pPr>
+            <a:r>
+              <a:rPr sz="1400" b="1">
+                <a:solidFill>
+                  <a:srgbClr val="E8793A"/>
+                </a:solidFill>
+                <a:latin typeface="Nunito Sans"/>
+              </a:rPr>
+              <a:t>BLOQUE 1 · REPASO DE LA UNIDAD</a:t>
+            </a:r>
+          </a:p>
+        </p:txBody>
+      </p:sp>
+      <p:sp>
+        <p:nvSpPr>
+          <p:cNvPr id="3" name="TextBox 2"/>
+          <p:cNvSpPr txBox="1"/>
+          <p:nvPr/>
+        </p:nvSpPr>
+        <p:spPr>
+          <a:xfrm>
+            <a:off x="640000" y="760000"/>
+            <a:ext cx="10912000" cy="800000"/>
+          </a:xfrm>
+          <a:prstGeom prst="rect">
+            <a:avLst/>
+          </a:prstGeom>
+          <a:noFill/>
+        </p:spPr>
+        <p:txBody>
+          <a:bodyPr wrap="square">
+            <a:spAutoFit/>
+          </a:bodyPr>
+          <a:lstStyle/>
+          <a:p>
+            <a:pPr>
+              <a:spcAft>
+                <a:spcPts val="1710"/>
+              </a:spcAft>
+            </a:pPr>
+            <a:r>
+              <a:rPr sz="3800" b="1">
+                <a:solidFill>
+                  <a:srgbClr val="1F2A44"/>
+                </a:solidFill>
+                <a:latin typeface="Fredoka"/>
+              </a:rPr>
+              <a:t>Cómo analizar una frase sospechosa</a:t>
+            </a:r>
+          </a:p>
+        </p:txBody>
+      </p:sp>
+      <p:sp>
+        <p:nvSpPr>
+          <p:cNvPr id="4" name="TextBox 3"/>
+          <p:cNvSpPr txBox="1"/>
+          <p:nvPr/>
+        </p:nvSpPr>
+        <p:spPr>
+          <a:xfrm>
+            <a:off x="640000" y="1650000"/>
+            <a:ext cx="10912000" cy="4808000"/>
+          </a:xfrm>
+          <a:prstGeom prst="rect">
+            <a:avLst/>
+          </a:prstGeom>
+          <a:noFill/>
+        </p:spPr>
+        <p:txBody>
+          <a:bodyPr wrap="square">
+            <a:spAutoFit/>
+          </a:bodyPr>
+          <a:lstStyle/>
+          <a:p>
+            <a:pPr>
+              <a:spcAft>
+                <a:spcPts val="1260"/>
+              </a:spcAft>
+            </a:pPr>
+            <a:r>
+              <a:rPr sz="2800" b="1">
+                <a:solidFill>
+                  <a:srgbClr val="E8793A"/>
+                </a:solidFill>
+                <a:latin typeface="Nunito Sans"/>
+              </a:rPr>
+              <a:t>• </a:t>
+            </a:r>
+            <a:r>
+              <a:rPr sz="2800" b="0">
+                <a:solidFill>
+                  <a:srgbClr val="1F2A44"/>
+                </a:solidFill>
+                <a:latin typeface="Nunito Sans"/>
+              </a:rPr>
+              <a:t>1. ¿Qué me piden creer o hacer?</a:t>
+            </a:r>
+          </a:p>
+          <a:p>
+            <a:pPr>
+              <a:spcAft>
+                <a:spcPts val="1260"/>
+              </a:spcAft>
+            </a:pPr>
+            <a:r>
+              <a:rPr sz="2800" b="1">
+                <a:solidFill>
+                  <a:srgbClr val="E8793A"/>
+                </a:solidFill>
+                <a:latin typeface="Nunito Sans"/>
+              </a:rPr>
+              <a:t>• </a:t>
+            </a:r>
+            <a:r>
+              <a:rPr sz="2800" b="0">
+                <a:solidFill>
+                  <a:srgbClr val="1F2A44"/>
+                </a:solidFill>
+                <a:latin typeface="Nunito Sans"/>
+              </a:rPr>
+              <a:t>2. ¿Qué razón me dan?</a:t>
+            </a:r>
+          </a:p>
+          <a:p>
+            <a:pPr>
+              <a:spcAft>
+                <a:spcPts val="1260"/>
+              </a:spcAft>
+            </a:pPr>
+            <a:r>
+              <a:rPr sz="2800" b="1">
+                <a:solidFill>
+                  <a:srgbClr val="E8793A"/>
+                </a:solidFill>
+                <a:latin typeface="Nunito Sans"/>
+              </a:rPr>
+              <a:t>• </a:t>
+            </a:r>
+            <a:r>
+              <a:rPr sz="2800" b="0">
+                <a:solidFill>
+                  <a:srgbClr val="1F2A44"/>
+                </a:solidFill>
+                <a:latin typeface="Nunito Sans"/>
+              </a:rPr>
+              <a:t>3. ¿Viene a cuento? ¿Habla de la idea o de otra cosa?</a:t>
+            </a:r>
+          </a:p>
+          <a:p>
+            <a:pPr>
+              <a:spcAft>
+                <a:spcPts val="1260"/>
+              </a:spcAft>
+            </a:pPr>
+            <a:r>
+              <a:rPr sz="2800" b="1">
+                <a:solidFill>
+                  <a:srgbClr val="E8793A"/>
+                </a:solidFill>
+                <a:latin typeface="Nunito Sans"/>
+              </a:rPr>
+              <a:t>• </a:t>
+            </a:r>
+            <a:r>
+              <a:rPr sz="2800" b="0">
+                <a:solidFill>
+                  <a:srgbClr val="1F2A44"/>
+                </a:solidFill>
+                <a:latin typeface="Nunito Sans"/>
+              </a:rPr>
+              <a:t>4. Si es un truco, ponle </a:t>
+            </a:r>
+            <a:r>
+              <a:rPr sz="2800" b="1">
+                <a:solidFill>
+                  <a:srgbClr val="1F2A44"/>
+                </a:solidFill>
+                <a:latin typeface="Nunito Sans"/>
+              </a:rPr>
+              <a:t>nombre</a:t>
+            </a:r>
+            <a:r>
+              <a:rPr sz="2800" b="0">
+                <a:solidFill>
+                  <a:srgbClr val="1F2A44"/>
+                </a:solidFill>
+                <a:latin typeface="Nunito Sans"/>
+              </a:rPr>
+              <a:t> y hazle su </a:t>
+            </a:r>
+            <a:r>
+              <a:rPr sz="2800" b="1">
+                <a:solidFill>
+                  <a:srgbClr val="1F2A44"/>
+                </a:solidFill>
+                <a:latin typeface="Nunito Sans"/>
+              </a:rPr>
+              <a:t>pregunta</a:t>
+            </a:r>
+          </a:p>
+        </p:txBody>
+      </p:sp>
+    </p:spTree>
+  </p:cSld>
+  <p:clrMapOvr>
+    <a:masterClrMapping/>
+  </p:clrMapOvr>
+</p:sld>
+</file>
+
+<file path=ppt/slides/slide11.xml><?xml version="1.0" encoding="utf-8"?>
 <p:sld xmlns:a="http://schemas.openxmlformats.org/drawingml/2006/main" xmlns:p="http://schemas.openxmlformats.org/presentationml/2006/main" xmlns:r="http://schemas.openxmlformats.org/officeDocument/2006/relationships">
   <p:cSld>
     <p:bg>
@@ -3728,7 +3983,7 @@
 </p:sld>
 </file>
 
-<file path=ppt/slides/slide11.xml><?xml version="1.0" encoding="utf-8"?>
+<file path=ppt/slides/slide12.xml><?xml version="1.0" encoding="utf-8"?>
 <p:sld xmlns:a="http://schemas.openxmlformats.org/drawingml/2006/main" xmlns:p="http://schemas.openxmlformats.org/presentationml/2006/main" xmlns:r="http://schemas.openxmlformats.org/officeDocument/2006/relationships">
   <p:cSld>
     <p:bg>
@@ -3819,7 +4074,7 @@
                 </a:solidFill>
                 <a:latin typeface="Fredoka"/>
               </a:rPr>
-              <a:t>Cuatro trucos en tres frases</a:t>
+              <a:t>Tres trucos en tres frases</a:t>
             </a:r>
           </a:p>
         </p:txBody>
@@ -3901,7 +4156,7 @@
                 </a:solidFill>
                 <a:latin typeface="Nunito Sans"/>
               </a:rPr>
-              <a:t>«Dos amigos míos dejaron el fútbol y suspendieron. O juegas al fútbol o suspendes. Y nadie ha demostrado lo contrario.»</a:t>
+              <a:t>«Tú no opinas, que siempre llegas tarde. Además, si no me das la razón, te quedas sin amigos. Y, por cierto, ¿has visto el partido?»</a:t>
             </a:r>
           </a:p>
         </p:txBody>
@@ -3949,7 +4204,7 @@
                 </a:solidFill>
                 <a:latin typeface="Nunito Sans"/>
               </a:rPr>
-              <a:t>«Dos amigos… suspendieron»: dos casos para una regla general (generalización) y «después de» tomado como causa (causa falsa).</a:t>
+              <a:t>«Siempre llegas tarde»: ataca a la persona, no a su opinión.</a:t>
             </a:r>
           </a:p>
           <a:p>
@@ -3974,7 +4229,7 @@
                 </a:solidFill>
                 <a:latin typeface="Nunito Sans"/>
               </a:rPr>
-              <a:t>«O juegas o suspendes»: solo dos opciones. Falso dilema.</a:t>
+              <a:t>«Te quedas sin amigos»: apelación al miedo, sin pruebas.</a:t>
             </a:r>
           </a:p>
           <a:p>
@@ -3999,7 +4254,7 @@
                 </a:solidFill>
                 <a:latin typeface="Nunito Sans"/>
               </a:rPr>
-              <a:t>«Nadie ha demostrado lo contrario»: apelación a la ignorancia.</a:t>
+              <a:t>«¿Has visto el partido?»: pista falsa, cambia de tema.</a:t>
             </a:r>
           </a:p>
           <a:p>
@@ -4024,7 +4279,7 @@
                 </a:solidFill>
                 <a:latin typeface="Nunito Sans"/>
               </a:rPr>
-              <a:t>Conclusión: cuatro falacias y ninguna buena razón para creer que el fútbol hace aprobar.</a:t>
+              <a:t>Conclusión: tres falacias y ninguna razón. La opinión del otro sigue sin respuesta.</a:t>
             </a:r>
           </a:p>
         </p:txBody>
@@ -4037,7 +4292,7 @@
 </p:sld>
 </file>
 
-<file path=ppt/slides/slide12.xml><?xml version="1.0" encoding="utf-8"?>
+<file path=ppt/slides/slide13.xml><?xml version="1.0" encoding="utf-8"?>
 <p:sld xmlns:a="http://schemas.openxmlformats.org/drawingml/2006/main" xmlns:p="http://schemas.openxmlformats.org/presentationml/2006/main" xmlns:r="http://schemas.openxmlformats.org/officeDocument/2006/relationships">
   <p:cSld>
     <p:bg>
@@ -4128,7 +4383,7 @@
                 </a:solidFill>
                 <a:latin typeface="Fredoka"/>
               </a:rPr>
-              <a:t>⚠ Todos los frenos</a:t>
+              <a:t>⚠ Miedo y prisa: ¿siempre falacia?</a:t>
             </a:r>
           </a:p>
         </p:txBody>
@@ -4210,7 +4465,7 @@
                 </a:solidFill>
                 <a:latin typeface="Nunito Sans"/>
               </a:rPr>
-              <a:t>Ejemplo inventado: los técnicos del metro revisan, uno por uno, los frenos de todos los trenes. Ninguno falla. Informe: «Todos los frenos funcionan».</a:t>
+              <a:t>Suena la alarma de incendios. La profesora: «¡Salid ya, en fila, sin coger las mochilas!».</a:t>
             </a:r>
           </a:p>
         </p:txBody>
@@ -4258,7 +4513,7 @@
                 </a:solidFill>
                 <a:latin typeface="Nunito Sans"/>
               </a:rPr>
-              <a:t>Dice «todos»… ¿generalización apresurada?</a:t>
+              <a:t>Mete miedo y prisa, como las cadenas de WhatsApp. ¿Es apelación al miedo?</a:t>
             </a:r>
           </a:p>
           <a:p>
@@ -4283,7 +4538,7 @@
                 </a:solidFill>
                 <a:latin typeface="Nunito Sans"/>
               </a:rPr>
-              <a:t>Dice «todos», y eso suele ser una señal de alarma.</a:t>
+              <a:t>Hay miedo y hay prisa: no deja pensar con calma.</a:t>
             </a:r>
           </a:p>
           <a:p>
@@ -4308,7 +4563,7 @@
                 </a:solidFill>
                 <a:latin typeface="Nunito Sans"/>
               </a:rPr>
-              <a:t>Pero han mirado todos los frenos, uno por uno: no queda ninguno sin revisar.</a:t>
+              <a:t>Pero el peligro es real, o puede serlo: la alarma es la señal.</a:t>
             </a:r>
           </a:p>
           <a:p>
@@ -4333,7 +4588,7 @@
                 </a:solidFill>
                 <a:latin typeface="Nunito Sans"/>
               </a:rPr>
-              <a:t>La falacia es decir más de lo que muestran los casos. Aquí los casos lo muestran todo.</a:t>
+              <a:t>Aquí pararse a discutir sería lo peligroso. Ya se comprobará después.</a:t>
             </a:r>
           </a:p>
           <a:p>
@@ -4358,150 +4613,7 @@
                 </a:solidFill>
                 <a:latin typeface="Nunito Sans"/>
               </a:rPr>
-              <a:t>Conclusión: no es falacia. Palabras como «todos» u «o… o…» son pistas, no pruebas: mira las razones.</a:t>
-            </a:r>
-          </a:p>
-        </p:txBody>
-      </p:sp>
-    </p:spTree>
-  </p:cSld>
-  <p:clrMapOvr>
-    <a:masterClrMapping/>
-  </p:clrMapOvr>
-</p:sld>
-</file>
-
-<file path=ppt/slides/slide13.xml><?xml version="1.0" encoding="utf-8"?>
-<p:sld xmlns:a="http://schemas.openxmlformats.org/drawingml/2006/main" xmlns:p="http://schemas.openxmlformats.org/presentationml/2006/main" xmlns:r="http://schemas.openxmlformats.org/officeDocument/2006/relationships">
-  <p:cSld>
-    <p:bg>
-      <p:bgPr>
-        <a:solidFill>
-          <a:srgbClr val="FBF7EF"/>
-        </a:solidFill>
-        <a:effectLst/>
-      </p:bgPr>
-    </p:bg>
-    <p:spTree>
-      <p:nvGrpSpPr>
-        <p:cNvPr id="1" name=""/>
-        <p:cNvGrpSpPr/>
-        <p:nvPr/>
-      </p:nvGrpSpPr>
-      <p:grpSpPr/>
-      <p:sp>
-        <p:nvSpPr>
-          <p:cNvPr id="2" name="TextBox 1"/>
-          <p:cNvSpPr txBox="1"/>
-          <p:nvPr/>
-        </p:nvSpPr>
-        <p:spPr>
-          <a:xfrm>
-            <a:off x="640000" y="380000"/>
-            <a:ext cx="10912000" cy="420000"/>
-          </a:xfrm>
-          <a:prstGeom prst="rect">
-            <a:avLst/>
-          </a:prstGeom>
-          <a:noFill/>
-        </p:spPr>
-        <p:txBody>
-          <a:bodyPr wrap="square">
-            <a:spAutoFit/>
-          </a:bodyPr>
-          <a:lstStyle/>
-          <a:p>
-            <a:pPr>
-              <a:spcAft>
-                <a:spcPts val="630"/>
-              </a:spcAft>
-            </a:pPr>
-            <a:r>
-              <a:rPr sz="1400" b="1">
-                <a:solidFill>
-                  <a:srgbClr val="E8793A"/>
-                </a:solidFill>
-                <a:latin typeface="Nunito Sans"/>
-              </a:rPr>
-              <a:t>LO DE HOY EN TRES LÍNEAS</a:t>
-            </a:r>
-          </a:p>
-        </p:txBody>
-      </p:sp>
-      <p:sp>
-        <p:nvSpPr>
-          <p:cNvPr id="3" name="TextBox 2"/>
-          <p:cNvSpPr txBox="1"/>
-          <p:nvPr/>
-        </p:nvSpPr>
-        <p:spPr>
-          <a:xfrm>
-            <a:off x="640000" y="760000"/>
-            <a:ext cx="10912000" cy="800000"/>
-          </a:xfrm>
-          <a:prstGeom prst="rect">
-            <a:avLst/>
-          </a:prstGeom>
-          <a:noFill/>
-        </p:spPr>
-        <p:txBody>
-          <a:bodyPr wrap="square">
-            <a:spAutoFit/>
-          </a:bodyPr>
-          <a:lstStyle/>
-          <a:p>
-            <a:pPr>
-              <a:spcAft>
-                <a:spcPts val="1710"/>
-              </a:spcAft>
-            </a:pPr>
-            <a:r>
-              <a:rPr sz="3800" b="1">
-                <a:solidFill>
-                  <a:srgbClr val="1F2A44"/>
-                </a:solidFill>
-                <a:latin typeface="Fredoka"/>
-              </a:rPr>
-              <a:t>Escríbelo tú primero, sin mirar</a:t>
-            </a:r>
-          </a:p>
-        </p:txBody>
-      </p:sp>
-      <p:sp>
-        <p:nvSpPr>
-          <p:cNvPr id="4" name="TextBox 3"/>
-          <p:cNvSpPr txBox="1"/>
-          <p:nvPr/>
-        </p:nvSpPr>
-        <p:spPr>
-          <a:xfrm>
-            <a:off x="640000" y="1800000"/>
-            <a:ext cx="10912000" cy="1500000"/>
-          </a:xfrm>
-          <a:prstGeom prst="rect">
-            <a:avLst/>
-          </a:prstGeom>
-          <a:noFill/>
-        </p:spPr>
-        <p:txBody>
-          <a:bodyPr wrap="square">
-            <a:spAutoFit/>
-          </a:bodyPr>
-          <a:lstStyle/>
-          <a:p>
-            <a:pPr>
-              <a:spcAft>
-                <a:spcPts val="1170"/>
-              </a:spcAft>
-            </a:pPr>
-            <a:r>
-              <a:rPr sz="2600" b="0">
-                <a:solidFill>
-                  <a:srgbClr val="4A5568"/>
-                </a:solidFill>
-                <a:latin typeface="Nunito Sans"/>
-              </a:rPr>
-              <a:t>Dos minutos. Después lo comparamos.</a:t>
+              <a:t>Conclusión: no es falacia. Mira si el peligro es real, no solo si da miedo.</a:t>
             </a:r>
           </a:p>
         </p:txBody>
@@ -4579,8 +4691,8 @@
         </p:nvSpPr>
         <p:spPr>
           <a:xfrm>
-            <a:off x="640000" y="1300000"/>
-            <a:ext cx="10912000" cy="4800000"/>
+            <a:off x="640000" y="760000"/>
+            <a:ext cx="10912000" cy="800000"/>
           </a:xfrm>
           <a:prstGeom prst="rect">
             <a:avLst/>
@@ -4595,76 +4707,56 @@
           <a:p>
             <a:pPr>
               <a:spcAft>
-                <a:spcPts val="1350"/>
+                <a:spcPts val="1710"/>
               </a:spcAft>
             </a:pPr>
             <a:r>
-              <a:rPr sz="3000" b="1">
-                <a:solidFill>
-                  <a:srgbClr val="E8793A"/>
-                </a:solidFill>
-                <a:latin typeface="Nunito Sans"/>
-              </a:rPr>
-              <a:t>1. </a:t>
-            </a:r>
-            <a:r>
-              <a:rPr sz="3000" b="0">
+              <a:rPr sz="3800" b="1">
                 <a:solidFill>
                   <a:srgbClr val="1F2A44"/>
                 </a:solidFill>
-                <a:latin typeface="Nunito Sans"/>
-              </a:rPr>
-              <a:t>En la unidad 4, las razones no bastan para la conclusión.</a:t>
-            </a:r>
-          </a:p>
+                <a:latin typeface="Fredoka"/>
+              </a:rPr>
+              <a:t>Escríbelo tú primero, sin mirar</a:t>
+            </a:r>
+          </a:p>
+        </p:txBody>
+      </p:sp>
+      <p:sp>
+        <p:nvSpPr>
+          <p:cNvPr id="4" name="TextBox 3"/>
+          <p:cNvSpPr txBox="1"/>
+          <p:nvPr/>
+        </p:nvSpPr>
+        <p:spPr>
+          <a:xfrm>
+            <a:off x="640000" y="1800000"/>
+            <a:ext cx="10912000" cy="1500000"/>
+          </a:xfrm>
+          <a:prstGeom prst="rect">
+            <a:avLst/>
+          </a:prstGeom>
+          <a:noFill/>
+        </p:spPr>
+        <p:txBody>
+          <a:bodyPr wrap="square">
+            <a:spAutoFit/>
+          </a:bodyPr>
+          <a:lstStyle/>
           <a:p>
             <a:pPr>
               <a:spcAft>
-                <a:spcPts val="1350"/>
+                <a:spcPts val="1170"/>
               </a:spcAft>
             </a:pPr>
             <a:r>
-              <a:rPr sz="3000" b="1">
-                <a:solidFill>
-                  <a:srgbClr val="E8793A"/>
-                </a:solidFill>
-                <a:latin typeface="Nunito Sans"/>
-              </a:rPr>
-              <a:t>2. </a:t>
-            </a:r>
-            <a:r>
-              <a:rPr sz="3000" b="0">
-                <a:solidFill>
-                  <a:srgbClr val="1F2A44"/>
-                </a:solidFill>
-                <a:latin typeface="Nunito Sans"/>
-              </a:rPr>
-              <a:t>Pocos casos, dos opciones, cadenas exageradas, causas falsas, vacíos de pruebas y círculos.</a:t>
-            </a:r>
-          </a:p>
-          <a:p>
-            <a:pPr>
-              <a:spcAft>
-                <a:spcPts val="1350"/>
-              </a:spcAft>
-            </a:pPr>
-            <a:r>
-              <a:rPr sz="3000" b="1">
-                <a:solidFill>
-                  <a:srgbClr val="E8793A"/>
-                </a:solidFill>
-                <a:latin typeface="Nunito Sans"/>
-              </a:rPr>
-              <a:t>3. </a:t>
-            </a:r>
-            <a:r>
-              <a:rPr sz="3000" b="0">
-                <a:solidFill>
-                  <a:srgbClr val="1F2A44"/>
-                </a:solidFill>
-                <a:latin typeface="Nunito Sans"/>
-              </a:rPr>
-              <a:t>Cada falacia tiene su pregunta: hazla antes de creerte la conclusión.</a:t>
+              <a:rPr sz="2600" b="0">
+                <a:solidFill>
+                  <a:srgbClr val="4A5568"/>
+                </a:solidFill>
+                <a:latin typeface="Nunito Sans"/>
+              </a:rPr>
+              <a:t>Dos minutos. Después lo comparamos.</a:t>
             </a:r>
           </a:p>
         </p:txBody>
@@ -4678,6 +4770,169 @@
 </file>
 
 <file path=ppt/slides/slide15.xml><?xml version="1.0" encoding="utf-8"?>
+<p:sld xmlns:a="http://schemas.openxmlformats.org/drawingml/2006/main" xmlns:p="http://schemas.openxmlformats.org/presentationml/2006/main" xmlns:r="http://schemas.openxmlformats.org/officeDocument/2006/relationships">
+  <p:cSld>
+    <p:bg>
+      <p:bgPr>
+        <a:solidFill>
+          <a:srgbClr val="FBF7EF"/>
+        </a:solidFill>
+        <a:effectLst/>
+      </p:bgPr>
+    </p:bg>
+    <p:spTree>
+      <p:nvGrpSpPr>
+        <p:cNvPr id="1" name=""/>
+        <p:cNvGrpSpPr/>
+        <p:nvPr/>
+      </p:nvGrpSpPr>
+      <p:grpSpPr/>
+      <p:sp>
+        <p:nvSpPr>
+          <p:cNvPr id="2" name="TextBox 1"/>
+          <p:cNvSpPr txBox="1"/>
+          <p:nvPr/>
+        </p:nvSpPr>
+        <p:spPr>
+          <a:xfrm>
+            <a:off x="640000" y="380000"/>
+            <a:ext cx="10912000" cy="420000"/>
+          </a:xfrm>
+          <a:prstGeom prst="rect">
+            <a:avLst/>
+          </a:prstGeom>
+          <a:noFill/>
+        </p:spPr>
+        <p:txBody>
+          <a:bodyPr wrap="square">
+            <a:spAutoFit/>
+          </a:bodyPr>
+          <a:lstStyle/>
+          <a:p>
+            <a:pPr>
+              <a:spcAft>
+                <a:spcPts val="630"/>
+              </a:spcAft>
+            </a:pPr>
+            <a:r>
+              <a:rPr sz="1400" b="1">
+                <a:solidFill>
+                  <a:srgbClr val="E8793A"/>
+                </a:solidFill>
+                <a:latin typeface="Nunito Sans"/>
+              </a:rPr>
+              <a:t>LO DE HOY EN TRES LÍNEAS</a:t>
+            </a:r>
+          </a:p>
+        </p:txBody>
+      </p:sp>
+      <p:sp>
+        <p:nvSpPr>
+          <p:cNvPr id="3" name="TextBox 2"/>
+          <p:cNvSpPr txBox="1"/>
+          <p:nvPr/>
+        </p:nvSpPr>
+        <p:spPr>
+          <a:xfrm>
+            <a:off x="640000" y="1300000"/>
+            <a:ext cx="10912000" cy="4800000"/>
+          </a:xfrm>
+          <a:prstGeom prst="rect">
+            <a:avLst/>
+          </a:prstGeom>
+          <a:noFill/>
+        </p:spPr>
+        <p:txBody>
+          <a:bodyPr wrap="square">
+            <a:spAutoFit/>
+          </a:bodyPr>
+          <a:lstStyle/>
+          <a:p>
+            <a:pPr>
+              <a:spcAft>
+                <a:spcPts val="1350"/>
+              </a:spcAft>
+            </a:pPr>
+            <a:r>
+              <a:rPr sz="3000" b="1">
+                <a:solidFill>
+                  <a:srgbClr val="E8793A"/>
+                </a:solidFill>
+                <a:latin typeface="Nunito Sans"/>
+              </a:rPr>
+              <a:t>1. </a:t>
+            </a:r>
+            <a:r>
+              <a:rPr sz="3000" b="0">
+                <a:solidFill>
+                  <a:srgbClr val="1F2A44"/>
+                </a:solidFill>
+                <a:latin typeface="Nunito Sans"/>
+              </a:rPr>
+              <a:t>Una falacia parece un buen argumento, pero sus razones no sostienen la conclusión.</a:t>
+            </a:r>
+          </a:p>
+          <a:p>
+            <a:pPr>
+              <a:spcAft>
+                <a:spcPts val="1350"/>
+              </a:spcAft>
+            </a:pPr>
+            <a:r>
+              <a:rPr sz="3000" b="1">
+                <a:solidFill>
+                  <a:srgbClr val="E8793A"/>
+                </a:solidFill>
+                <a:latin typeface="Nunito Sans"/>
+              </a:rPr>
+              <a:t>2. </a:t>
+            </a:r>
+            <a:r>
+              <a:rPr sz="3000" b="0">
+                <a:solidFill>
+                  <a:srgbClr val="1F2A44"/>
+                </a:solidFill>
+                <a:latin typeface="Nunito Sans"/>
+              </a:rPr>
+              <a:t>Las de esta unidad atacan a la persona, deforman la idea, desvían o emocionan.</a:t>
+            </a:r>
+          </a:p>
+          <a:p>
+            <a:pPr>
+              <a:spcAft>
+                <a:spcPts val="1350"/>
+              </a:spcAft>
+            </a:pPr>
+            <a:r>
+              <a:rPr sz="3000" b="1">
+                <a:solidFill>
+                  <a:srgbClr val="E8793A"/>
+                </a:solidFill>
+                <a:latin typeface="Nunito Sans"/>
+              </a:rPr>
+              <a:t>3. </a:t>
+            </a:r>
+            <a:r>
+              <a:rPr sz="3000" b="0">
+                <a:solidFill>
+                  <a:srgbClr val="1F2A44"/>
+                </a:solidFill>
+                <a:latin typeface="Nunito Sans"/>
+              </a:rPr>
+              <a:t>Cada falacia tiene una pregunta que la desmonta.</a:t>
+            </a:r>
+          </a:p>
+        </p:txBody>
+      </p:sp>
+    </p:spTree>
+  </p:cSld>
+  <p:clrMapOvr>
+    <a:masterClrMapping/>
+  </p:clrMapOvr>
+</p:sld>
+</file>
+
+<file path=ppt/slides/slide16.xml><?xml version="1.0" encoding="utf-8"?>
 <p:sld xmlns:a="http://schemas.openxmlformats.org/drawingml/2006/main" xmlns:p="http://schemas.openxmlformats.org/presentationml/2006/main" xmlns:r="http://schemas.openxmlformats.org/officeDocument/2006/relationships">
   <p:cSld>
     <p:bg>
@@ -5322,7 +5577,7 @@
                 </a:solidFill>
                 <a:latin typeface="Nunito Sans"/>
               </a:rPr>
-              <a:t>Apelación a la ignorancia: decir que algo es verdad porque nadie ha demostrado que sea ______.  (sesión 23)</a:t>
+              <a:t>La pista falsa consiste en cambiar de ______ para no responder.  (sesión 23)</a:t>
             </a:r>
           </a:p>
           <a:p>
@@ -5347,7 +5602,7 @@
                 </a:solidFill>
                 <a:latin typeface="Nunito Sans"/>
               </a:rPr>
-              <a:t>En el razonamiento circular, la conclusión ya está ______ en la premisa.  (sesión 23)</a:t>
+              <a:t>Pregunta que la desmonta: ¿qué tiene que ______ esto con lo que hablábamos?  (sesión 23)</a:t>
             </a:r>
           </a:p>
           <a:p>
@@ -5372,7 +5627,7 @@
                 </a:solidFill>
                 <a:latin typeface="Nunito Sans"/>
               </a:rPr>
-              <a:t>Pregunta que desmonta la generalización apresurada: ¿cuántos ______ has mirado?  (sesión 19)</a:t>
+              <a:t>Una falacia es un argumento que ______ bueno, pero no lo es.  (sesión 19)</a:t>
             </a:r>
           </a:p>
         </p:txBody>
@@ -5524,7 +5779,7 @@
                 </a:solidFill>
                 <a:latin typeface="Nunito Sans"/>
               </a:rPr>
-              <a:t>Apelación a la ignorancia: decir que algo es verdad porque nadie ha demostrado que sea </a:t>
+              <a:t>La pista falsa consiste en cambiar de </a:t>
             </a:r>
             <a:r>
               <a:rPr sz="2600" b="1">
@@ -5533,7 +5788,7 @@
                 </a:solidFill>
                 <a:latin typeface="Nunito Sans"/>
               </a:rPr>
-              <a:t>falso</a:t>
+              <a:t>tema</a:t>
             </a:r>
             <a:r>
               <a:rPr sz="2600" b="0">
@@ -5542,7 +5797,7 @@
                 </a:solidFill>
                 <a:latin typeface="Nunito Sans"/>
               </a:rPr>
-              <a:t>.  (sesión 23)</a:t>
+              <a:t> para no responder.  (sesión 23)</a:t>
             </a:r>
           </a:p>
           <a:p>
@@ -5567,7 +5822,7 @@
                 </a:solidFill>
                 <a:latin typeface="Nunito Sans"/>
               </a:rPr>
-              <a:t>En el razonamiento circular, la conclusión ya está </a:t>
+              <a:t>Pregunta que la desmonta: ¿qué tiene que </a:t>
             </a:r>
             <a:r>
               <a:rPr sz="2600" b="1">
@@ -5576,7 +5831,7 @@
                 </a:solidFill>
                 <a:latin typeface="Nunito Sans"/>
               </a:rPr>
-              <a:t>escondida</a:t>
+              <a:t>ver</a:t>
             </a:r>
             <a:r>
               <a:rPr sz="2600" b="0">
@@ -5585,7 +5840,7 @@
                 </a:solidFill>
                 <a:latin typeface="Nunito Sans"/>
               </a:rPr>
-              <a:t> en la premisa.  (sesión 23)</a:t>
+              <a:t> esto con lo que hablábamos?  (sesión 23)</a:t>
             </a:r>
           </a:p>
           <a:p>
@@ -5610,7 +5865,7 @@
                 </a:solidFill>
                 <a:latin typeface="Nunito Sans"/>
               </a:rPr>
-              <a:t>Pregunta que desmonta la generalización apresurada: ¿cuántos </a:t>
+              <a:t>Una falacia es un argumento que </a:t>
             </a:r>
             <a:r>
               <a:rPr sz="2600" b="1">
@@ -5619,7 +5874,7 @@
                 </a:solidFill>
                 <a:latin typeface="Nunito Sans"/>
               </a:rPr>
-              <a:t>casos</a:t>
+              <a:t>parece</a:t>
             </a:r>
             <a:r>
               <a:rPr sz="2600" b="0">
@@ -5628,7 +5883,7 @@
                 </a:solidFill>
                 <a:latin typeface="Nunito Sans"/>
               </a:rPr>
-              <a:t> has mirado?  (sesión 19)</a:t>
+              <a:t> bueno, pero no lo es.  (sesión 19)</a:t>
             </a:r>
           </a:p>
         </p:txBody>
@@ -5775,7 +6030,7 @@
                 </a:solidFill>
                 <a:latin typeface="Nunito Sans"/>
               </a:rPr>
-              <a:t>«Dos amigos míos dejaron el fútbol y suspendieron. O juegas al fútbol o suspendes. Y nadie ha demostrado lo contrario.»</a:t>
+              <a:t>«Tú no opinas, que siempre llegas tarde. Además, si no me das la razón, te quedas sin amigos. Y, por cierto, ¿has visto el partido?»</a:t>
             </a:r>
           </a:p>
         </p:txBody>
@@ -6022,7 +6277,7 @@
                 </a:solidFill>
                 <a:latin typeface="Fredoka"/>
               </a:rPr>
-              <a:t>Razonar mal (unidad 4)</a:t>
+              <a:t>Falacia (sesión 19)</a:t>
             </a:r>
           </a:p>
         </p:txBody>
@@ -6104,7 +6359,7 @@
                 </a:solidFill>
                 <a:latin typeface="Nunito Sans"/>
               </a:rPr>
-              <a:t>En la unidad 3, las razones no venían a cuento. En esta, las razones no bastan para la conclusión.</a:t>
+              <a:t>Un argumento que parece bueno, pero no lo es: sus razones no sostienen la conclusión.</a:t>
             </a:r>
           </a:p>
         </p:txBody>
@@ -6152,7 +6407,7 @@
                 </a:solidFill>
                 <a:latin typeface="Nunito Sans"/>
               </a:rPr>
-              <a:t>Pocos casos, pocas opciones, pasos sin razones</a:t>
+              <a:t>Suele fallar: ¿viene a cuento? o ¿es suficiente?</a:t>
             </a:r>
           </a:p>
           <a:p>
@@ -6177,7 +6432,7 @@
                 </a:solidFill>
                 <a:latin typeface="Nunito Sans"/>
               </a:rPr>
-              <a:t>Causas inventadas, vacíos de pruebas y círculos</a:t>
+              <a:t>Puede tener una conclusión verdadera: falla el camino</a:t>
             </a:r>
           </a:p>
         </p:txBody>
@@ -6281,7 +6536,7 @@
                 </a:solidFill>
                 <a:latin typeface="Fredoka"/>
               </a:rPr>
-              <a:t>Sesiones 19, 20 y 21</a:t>
+              <a:t>Atacar y deformar (sesiones 20 y 21)</a:t>
             </a:r>
           </a:p>
         </p:txBody>
@@ -6390,7 +6645,7 @@
                           </a:solidFill>
                           <a:latin typeface="Nunito Sans"/>
                         </a:rPr>
-                        <a:t>Generalización apresurada</a:t>
+                        <a:t>Ataque a la persona</a:t>
                       </a:r>
                     </a:p>
                   </a:txBody>
@@ -6412,7 +6667,7 @@
                           </a:solidFill>
                           <a:latin typeface="Nunito Sans"/>
                         </a:rPr>
-                        <a:t>De pocos casos a «todos»</a:t>
+                        <a:t>Ataca a quien habla</a:t>
                       </a:r>
                     </a:p>
                   </a:txBody>
@@ -6434,7 +6689,7 @@
                           </a:solidFill>
                           <a:latin typeface="Nunito Sans"/>
                         </a:rPr>
-                        <a:t>¿Cuántos casos has mirado?</a:t>
+                        <a:t>¿Qué tiene que ver quién lo dice?</a:t>
                       </a:r>
                     </a:p>
                   </a:txBody>
@@ -6458,7 +6713,7 @@
                           </a:solidFill>
                           <a:latin typeface="Nunito Sans"/>
                         </a:rPr>
-                        <a:t>Falso dilema</a:t>
+                        <a:t>«Tú también»</a:t>
                       </a:r>
                     </a:p>
                   </a:txBody>
@@ -6480,7 +6735,7 @@
                           </a:solidFill>
                           <a:latin typeface="Nunito Sans"/>
                         </a:rPr>
-                        <a:t>Solo dos opciones</a:t>
+                        <a:t>Tú tampoco lo cumples</a:t>
                       </a:r>
                     </a:p>
                   </a:txBody>
@@ -6502,7 +6757,7 @@
                           </a:solidFill>
                           <a:latin typeface="Nunito Sans"/>
                         </a:rPr>
-                        <a:t>¿Seguro que no hay una tercera?</a:t>
+                        <a:t>¿Eso hace falso el consejo?</a:t>
                       </a:r>
                     </a:p>
                   </a:txBody>
@@ -6526,7 +6781,7 @@
                           </a:solidFill>
                           <a:latin typeface="Nunito Sans"/>
                         </a:rPr>
-                        <a:t>Pendiente resbaladiza</a:t>
+                        <a:t>Hombre de paja</a:t>
                       </a:r>
                     </a:p>
                   </a:txBody>
@@ -6548,7 +6803,7 @@
                           </a:solidFill>
                           <a:latin typeface="Nunito Sans"/>
                         </a:rPr>
-                        <a:t>Cadena de pasos terribles</a:t>
+                        <a:t>Deforma la idea del otro</a:t>
                       </a:r>
                     </a:p>
                   </a:txBody>
@@ -6570,7 +6825,7 @@
                           </a:solidFill>
                           <a:latin typeface="Nunito Sans"/>
                         </a:rPr>
-                        <a:t>¿Por qué un paso lleva al siguiente?</a:t>
+                        <a:t>¿Es eso exactamente lo que he dicho?</a:t>
                       </a:r>
                     </a:p>
                   </a:txBody>
@@ -6684,7 +6939,7 @@
                 </a:solidFill>
                 <a:latin typeface="Fredoka"/>
               </a:rPr>
-              <a:t>Sesiones 22 y 23</a:t>
+              <a:t>Emocionar y desviar (sesiones 22 y 23)</a:t>
             </a:r>
           </a:p>
         </p:txBody>
@@ -6793,7 +7048,7 @@
                           </a:solidFill>
                           <a:latin typeface="Nunito Sans"/>
                         </a:rPr>
-                        <a:t>Causa falsa</a:t>
+                        <a:t>Apelación al miedo</a:t>
                       </a:r>
                     </a:p>
                   </a:txBody>
@@ -6815,7 +7070,7 @@
                           </a:solidFill>
                           <a:latin typeface="Nunito Sans"/>
                         </a:rPr>
-                        <a:t>Después de, luego por culpa de</a:t>
+                        <a:t>Asusta sin pruebas</a:t>
                       </a:r>
                     </a:p>
                   </a:txBody>
@@ -6837,7 +7092,7 @@
                           </a:solidFill>
                           <a:latin typeface="Nunito Sans"/>
                         </a:rPr>
-                        <a:t>¿Casualidad u otra causa?</a:t>
+                        <a:t>¿Ese peligro es real?</a:t>
                       </a:r>
                     </a:p>
                   </a:txBody>
@@ -6861,7 +7116,7 @@
                           </a:solidFill>
                           <a:latin typeface="Nunito Sans"/>
                         </a:rPr>
-                        <a:t>Apelación a la ignorancia</a:t>
+                        <a:t>Apelación a la pena</a:t>
                       </a:r>
                     </a:p>
                   </a:txBody>
@@ -6883,7 +7138,7 @@
                           </a:solidFill>
                           <a:latin typeface="Nunito Sans"/>
                         </a:rPr>
-                        <a:t>Nadie demostró que no, luego sí</a:t>
+                        <a:t>Da pena, no razones</a:t>
                       </a:r>
                     </a:p>
                   </a:txBody>
@@ -6905,7 +7160,7 @@
                           </a:solidFill>
                           <a:latin typeface="Nunito Sans"/>
                         </a:rPr>
-                        <a:t>¿Qué pruebas hay a favor?</a:t>
+                        <a:t>Si quito la pena, ¿qué razón queda?</a:t>
                       </a:r>
                     </a:p>
                   </a:txBody>
@@ -6929,7 +7184,7 @@
                           </a:solidFill>
                           <a:latin typeface="Nunito Sans"/>
                         </a:rPr>
-                        <a:t>Razonamiento circular</a:t>
+                        <a:t>Pista falsa</a:t>
                       </a:r>
                     </a:p>
                   </a:txBody>
@@ -6951,7 +7206,7 @@
                           </a:solidFill>
                           <a:latin typeface="Nunito Sans"/>
                         </a:rPr>
-                        <a:t>La conclusión es la razón</a:t>
+                        <a:t>Cambia de tema</a:t>
                       </a:r>
                     </a:p>
                   </a:txBody>
@@ -6973,7 +7228,7 @@
                           </a:solidFill>
                           <a:latin typeface="Nunito Sans"/>
                         </a:rPr>
-                        <a:t>¿La razón dice algo distinto?</a:t>
+                        <a:t>¿Qué tiene que ver con lo que hablábamos?</a:t>
                       </a:r>
                     </a:p>
                   </a:txBody>
@@ -7217,7 +7472,7 @@
                 </a:solidFill>
                 <a:latin typeface="Nunito Sans"/>
               </a:rPr>
-              <a:t>Uno o dos casos → «todos»</a:t>
+              <a:t>Atacar a la persona sin más</a:t>
             </a:r>
           </a:p>
           <a:p>
@@ -7242,7 +7497,7 @@
                 </a:solidFill>
                 <a:latin typeface="Nunito Sans"/>
               </a:rPr>
-              <a:t>Esconder las opciones del medio</a:t>
+              <a:t>Exagerar la idea del otro</a:t>
             </a:r>
           </a:p>
           <a:p>
@@ -7267,7 +7522,7 @@
                 </a:solidFill>
                 <a:latin typeface="Nunito Sans"/>
               </a:rPr>
-              <a:t>Cadena de pasos sin razones</a:t>
+              <a:t>Asustar sin pruebas</a:t>
             </a:r>
           </a:p>
           <a:p>
@@ -7292,7 +7547,7 @@
                 </a:solidFill>
                 <a:latin typeface="Nunito Sans"/>
               </a:rPr>
-              <a:t>«Después de» → «por culpa de»</a:t>
+              <a:t>Cambiar de tema para esquivar</a:t>
             </a:r>
           </a:p>
         </p:txBody>
@@ -7422,7 +7677,7 @@
                 </a:solidFill>
                 <a:latin typeface="Nunito Sans"/>
               </a:rPr>
-              <a:t>Muchos casos variados → «la mayoría»</a:t>
+              <a:t>Dudar de quien gana dinero con ello</a:t>
             </a:r>
           </a:p>
           <a:p>
@@ -7447,7 +7702,7 @@
                 </a:solidFill>
                 <a:latin typeface="Nunito Sans"/>
               </a:rPr>
-              <a:t>Dos opciones que de verdad son las únicas</a:t>
+              <a:t>Resumir la idea con justicia</a:t>
             </a:r>
           </a:p>
           <a:p>
@@ -7472,7 +7727,7 @@
                 </a:solidFill>
                 <a:latin typeface="Nunito Sans"/>
               </a:rPr>
-              <a:t>Consecuencias con razones en cada paso</a:t>
+              <a:t>Avisar de un peligro real con razones</a:t>
             </a:r>
           </a:p>
           <a:p>
@@ -7497,7 +7752,7 @@
                 </a:solidFill>
                 <a:latin typeface="Nunito Sans"/>
               </a:rPr>
-              <a:t>Causa comprobada varias veces y explicada</a:t>
+              <a:t>Cambiar de tema por algo urgente</a:t>
             </a:r>
           </a:p>
         </p:txBody>
